--- a/lectures/L03/slides.pptx
+++ b/lectures/L03/slides.pptx
@@ -51,9 +51,10 @@
     <p:sldId id="299" r:id="rId45"/>
     <p:sldId id="300" r:id="rId46"/>
     <p:sldId id="301" r:id="rId47"/>
+    <p:sldId id="302" r:id="rId48"/>
   </p:sldIdLst>
   <p:notesMasterIdLst>
-    <p:notesMasterId r:id="rId48"/>
+    <p:notesMasterId r:id="rId49"/>
   </p:notesMasterIdLst>
   <p:sldSz cx="9334500" cy="5248275"/>
   <p:notesSz cx="5248275" cy="9334500"/>
@@ -636,7 +637,12 @@
           <a:p>
             <a:r>
               <a:rPr lang="en-US" dirty="0"/>
-              <a:t/>
+              <a:t>Added files are the only files the model can edit. Say that twice.
+The repo map is an auto-generated summary, not a substitute for adding the
+file.
+Chat history accumulates until /clear. That is the second pitfall, two
+slides from now.
+The system prompt is Aider's own, and the default is fine for now.</a:t>
             </a:r>
             <a:endParaRPr lang="en-US" dirty="0"/>
           </a:p>
@@ -724,7 +730,12 @@
           <a:p>
             <a:r>
               <a:rPr lang="en-US" dirty="0"/>
-              <a:t/>
+              <a:t>Added files are the only files the model can edit. Say that twice.
+The repo map is an auto-generated summary, not a substitute for adding the
+file.
+Chat history accumulates until /clear. That is the second pitfall, two
+slides from now.
+The system prompt is Aider's own, and the default is fine for now.</a:t>
             </a:r>
             <a:endParaRPr lang="en-US" dirty="0"/>
           </a:p>
@@ -812,7 +823,12 @@
           <a:p>
             <a:r>
               <a:rPr lang="en-US" dirty="0"/>
-              <a:t/>
+              <a:t>Added files are the only files the model can edit. Say that twice.
+The repo map is an auto-generated summary, not a substitute for adding the
+file.
+Chat history accumulates until /clear. That is the second pitfall, two
+slides from now.
+The system prompt is Aider's own, and the default is fine for now.</a:t>
             </a:r>
             <a:endParaRPr lang="en-US" dirty="0"/>
           </a:p>
@@ -900,7 +916,12 @@
           <a:p>
             <a:r>
               <a:rPr lang="en-US" dirty="0"/>
-              <a:t/>
+              <a:t>Added files are the only files the model can edit. Say that twice.
+The repo map is an auto-generated summary, not a substitute for adding the
+file.
+Chat history accumulates until /clear. That is the second pitfall, two
+slides from now.
+The system prompt is Aider's own, and the default is fine for now.</a:t>
             </a:r>
             <a:endParaRPr lang="en-US" dirty="0"/>
           </a:p>
@@ -1076,7 +1097,11 @@
           <a:p>
             <a:r>
               <a:rPr lang="en-US" dirty="0"/>
-              <a:t/>
+              <a:t>Three questions, asked before every task, not once at the start of a
+session.
+Only the first card can be edited at all. The second is what the model has
+to read to get the first right.
+Reference is usually where the repo map is already enough.</a:t>
             </a:r>
             <a:endParaRPr lang="en-US" dirty="0"/>
           </a:p>
@@ -1254,7 +1279,15 @@
           <a:p>
             <a:r>
               <a:rPr lang="en-US" dirty="0"/>
-              <a:t/>
+              <a:t>Missing context is the most common failure in this course. The model edits
+what is in context, so a file that was never added cannot be fixed. Aider
+offers to add it and taking the offer saves you. Decline it, or use a tool
+that does not ask, and one file gets updated alone: a partial change that
+looks finished.
+History bleed is subtler. Ten minutes on task A, start task B, and those
+messages are still sitting there carrying assumptions. /clear resets the
+conversation and keeps the files.
+This sets up the break. Do not answer it here.</a:t>
             </a:r>
             <a:endParaRPr lang="en-US" dirty="0"/>
           </a:p>
@@ -1433,7 +1466,9 @@
           <a:p>
             <a:r>
               <a:rPr lang="en-US" dirty="0"/>
-              <a:t/>
+              <a:t>Context is what you feed the model. This is the other half of the same
+decision.
+Ten minutes here, then prompt.</a:t>
             </a:r>
             <a:endParaRPr lang="en-US" dirty="0"/>
           </a:p>
@@ -1611,7 +1646,11 @@
           <a:p>
             <a:r>
               <a:rPr lang="en-US" dirty="0"/>
-              <a:t/>
+              <a:t>Speed and size track reasoning ability. Smarter tends to be bigger, which
+on their own hardware means slower and hungrier for RAM rather than more
+expensive in dollars. The tradeoff does not disappear when the bill does.
+Some models do 128K, some do 1M, and L02 already told them bigger is not
+automatically better. Needle in a haystack is real.</a:t>
             </a:r>
             <a:endParaRPr lang="en-US" dirty="0"/>
           </a:p>
@@ -1699,7 +1738,11 @@
           <a:p>
             <a:r>
               <a:rPr lang="en-US" dirty="0"/>
-              <a:t/>
+              <a:t>Speed and size track reasoning ability. Smarter tends to be bigger, which
+on their own hardware means slower and hungrier for RAM rather than more
+expensive in dollars. The tradeoff does not disappear when the bill does.
+Some models do 128K, some do 1M, and L02 already told them bigger is not
+automatically better. Needle in a haystack is real.</a:t>
             </a:r>
             <a:endParaRPr lang="en-US" dirty="0"/>
           </a:p>
@@ -1787,7 +1830,11 @@
           <a:p>
             <a:r>
               <a:rPr lang="en-US" dirty="0"/>
-              <a:t/>
+              <a:t>Speed and size track reasoning ability. Smarter tends to be bigger, which
+on their own hardware means slower and hungrier for RAM rather than more
+expensive in dollars. The tradeoff does not disappear when the bill does.
+Some models do 128K, some do 1M, and L02 already told them bigger is not
+automatically better. Needle in a haystack is real.</a:t>
             </a:r>
             <a:endParaRPr lang="en-US" dirty="0"/>
           </a:p>
@@ -1875,7 +1922,11 @@
           <a:p>
             <a:r>
               <a:rPr lang="en-US" dirty="0"/>
-              <a:t/>
+              <a:t>Speed and size track reasoning ability. Smarter tends to be bigger, which
+on their own hardware means slower and hungrier for RAM rather than more
+expensive in dollars. The tradeoff does not disappear when the bill does.
+Some models do 128K, some do 1M, and L02 already told them bigger is not
+automatically better. Needle in a haystack is real.</a:t>
             </a:r>
             <a:endParaRPr lang="en-US" dirty="0"/>
           </a:p>
@@ -1963,7 +2014,11 @@
           <a:p>
             <a:r>
               <a:rPr lang="en-US" dirty="0"/>
-              <a:t/>
+              <a:t>Speed and size track reasoning ability. Smarter tends to be bigger, which
+on their own hardware means slower and hungrier for RAM rather than more
+expensive in dollars. The tradeoff does not disappear when the bill does.
+Some models do 128K, some do 1M, and L02 already told them bigger is not
+automatically better. Needle in a haystack is real.</a:t>
             </a:r>
             <a:endParaRPr lang="en-US" dirty="0"/>
           </a:p>
@@ -2051,7 +2106,9 @@
           <a:p>
             <a:r>
               <a:rPr lang="en-US" dirty="0"/>
-              <a:t/>
+              <a:t>Per task, not per term. That is the whole slide.
+The leaderboard is worth knowing, and it is a proxy for their task rather
+than a substitute for running their task.</a:t>
             </a:r>
             <a:endParaRPr lang="en-US" dirty="0"/>
           </a:p>
@@ -2228,7 +2285,8 @@
           <a:p>
             <a:r>
               <a:rPr lang="en-US" dirty="0"/>
-              <a:t/>
+              <a:t>The last lever, and the shortest section, because L04 is the whole lecture
+on it.</a:t>
             </a:r>
             <a:endParaRPr lang="en-US" dirty="0"/>
           </a:p>
@@ -2316,7 +2374,22 @@
           <a:p>
             <a:r>
               <a:rPr lang="en-US" dirty="0"/>
-              <a:t/>
+              <a:t>Prompts have two parts. The instruction is what you want done. The intent
+is the reason you want it done that way. Leave the intent out and the model
+fills it from training-data priors, a guess you never got to see.
+The line this slide rests on: specification closes decisions, intent steers
+the ones you left open. That is why one is a band and the other is an
+arrow. Say it before you explain the arrow.
+Then pre-empt the misread: the arrow is not telling them to be vaguer, it
+is telling them the target gets wider on that end when you say why. Intent
+extends the left edge and does nothing to the right edge, because it cannot
+rescue you from having already written the code yourself.
+Aim for the interface: name the file, the function, the signature, the call
+site, and stop. You own the seam, the model writes the body.
+Required, not optional: the arrow has a length and its length is model
+capability. On the 4B it is short. A paragraph of why can bury the one
+sentence of what, which is L02's needle in a haystack aimed at their own
+prompt. Keep intent to a clause this term.</a:t>
             </a:r>
             <a:endParaRPr lang="en-US" dirty="0"/>
           </a:p>
@@ -2404,7 +2477,12 @@
           <a:p>
             <a:r>
               <a:rPr lang="en-US" dirty="0"/>
-              <a:t/>
+              <a:t>The vague one sets a direction and leaves every specific decision to the
+model. It is not wrong, it is unpredictable, and unpredictable is the
+problem.
+The specific one is longer to write and faster to use. Predictability is
+the goal, not brevity.
+L04 formalizes this as an IDK prompt.</a:t>
             </a:r>
             <a:endParaRPr lang="en-US" dirty="0"/>
           </a:p>
@@ -2492,7 +2570,10 @@
           <a:p>
             <a:r>
               <a:rPr lang="en-US" dirty="0"/>
-              <a:t/>
+              <a:t>L02 gave them tokenization, the context window, hallucination, capability
+against knowledge. That was the mechanics. This is the framework on top.
+Three choices in every session. Get one wrong and no amount of effort in
+the other two saves you.</a:t>
             </a:r>
             <a:endParaRPr lang="en-US" dirty="0"/>
           </a:p>
@@ -2580,8 +2661,10 @@
           <a:p>
             <a:r>
               <a:rPr lang="en-US" dirty="0"/>
-              <a:t>Specify outcome, not implementation. But "what" must be specific.
-"What &gt; How" ≠ "be vague and AI will figure it out."</a:t>
+              <a:t>Specify outcome, not implementation. But "what" has to be specific enough
+to succeed.
+Sharper now that they have the spectrum: specify down to the interface and
+stop there. "What &gt; How" is not "be vague and the AI will figure it out."</a:t>
             </a:r>
             <a:endParaRPr lang="en-US" dirty="0"/>
           </a:p>
@@ -2624,6 +2707,98 @@
 </file>
 
 <file path=ppt/notesSlides/notesSlide31.xml><?xml version="1.0" encoding="utf-8"?>
+<p:notes xmlns:a="http://schemas.openxmlformats.org/drawingml/2006/main" xmlns:r="http://schemas.openxmlformats.org/officeDocument/2006/relationships" xmlns:p="http://schemas.openxmlformats.org/presentationml/2006/main">
+  <p:cSld>
+    <p:spTree>
+      <p:nvGrpSpPr>
+        <p:cNvPr id="1" name=""/>
+        <p:cNvGrpSpPr/>
+        <p:nvPr/>
+      </p:nvGrpSpPr>
+      <p:grpSpPr>
+        <a:xfrm>
+          <a:off x="0" y="0"/>
+          <a:ext cx="0" cy="0"/>
+          <a:chOff x="0" y="0"/>
+          <a:chExt cx="0" cy="0"/>
+        </a:xfrm>
+      </p:grpSpPr>
+      <p:sp>
+        <p:nvSpPr>
+          <p:cNvPr id="2" name="Slide Image Placeholder 1"/>
+          <p:cNvSpPr>
+            <a:spLocks noGrp="1" noRot="1" noChangeAspect="1"/>
+          </p:cNvSpPr>
+          <p:nvPr>
+            <p:ph type="sldImg"/>
+          </p:nvPr>
+        </p:nvSpPr>
+        <p:spPr/>
+      </p:sp>
+      <p:sp>
+        <p:nvSpPr>
+          <p:cNvPr id="3" name="Notes Placeholder 2"/>
+          <p:cNvSpPr>
+            <a:spLocks noGrp="1"/>
+          </p:cNvSpPr>
+          <p:nvPr>
+            <p:ph type="body" idx="1"/>
+          </p:nvPr>
+        </p:nvSpPr>
+        <p:spPr/>
+        <p:txBody>
+          <a:bodyPr/>
+          <a:lstStyle/>
+          <a:p>
+            <a:r>
+              <a:rPr lang="en-US" dirty="0"/>
+              <a:t>The recap before the demo. Each lever is one of last lecture's mechanics
+with a handle on it.
+Land this: every piece of prompting advice they will ever read reduces to
+one of these three. "Add the file" exploits the window. "Be specific"
+exploits the priors.</a:t>
+            </a:r>
+            <a:endParaRPr lang="en-US" dirty="0"/>
+          </a:p>
+        </p:txBody>
+      </p:sp>
+      <p:sp>
+        <p:nvSpPr>
+          <p:cNvPr id="4" name="Slide Number Placeholder 3"/>
+          <p:cNvSpPr>
+            <a:spLocks noGrp="1"/>
+          </p:cNvSpPr>
+          <p:nvPr>
+            <p:ph type="sldNum" sz="quarter" idx="10"/>
+          </p:nvPr>
+        </p:nvSpPr>
+        <p:spPr/>
+        <p:txBody>
+          <a:bodyPr/>
+          <a:lstStyle/>
+          <a:p>
+            <a:fld id="{F7021451-1387-4CA6-816F-3879F97B5CBC}" type="slidenum">
+              <a:rPr lang="en-US"/>
+              <a:t>31</a:t>
+            </a:fld>
+            <a:endParaRPr lang="en-US"/>
+          </a:p>
+        </p:txBody>
+      </p:sp>
+    </p:spTree>
+    <p:extLst>
+      <p:ext uri="{BB962C8B-B14F-4D97-AF65-F5344CB8AC3E}">
+        <p14:creationId xmlns:p14="http://schemas.microsoft.com/office/powerpoint/2010/main" val="1024086991"/>
+      </p:ext>
+    </p:extLst>
+  </p:cSld>
+  <p:clrMapOvr>
+    <a:masterClrMapping/>
+  </p:clrMapOvr>
+</p:notes>
+</file>
+
+<file path=ppt/notesSlides/notesSlide32.xml><?xml version="1.0" encoding="utf-8"?>
 <p:notes xmlns:a="http://schemas.openxmlformats.org/drawingml/2006/main" xmlns:r="http://schemas.openxmlformats.org/officeDocument/2006/relationships" xmlns:p="http://schemas.openxmlformats.org/presentationml/2006/main">
   <p:cSld>
     <p:spTree>
@@ -2693,7 +2868,7 @@
           <a:p>
             <a:fld id="{F7021451-1387-4CA6-816F-3879F97B5CBC}" type="slidenum">
               <a:rPr lang="en-US"/>
-              <a:t>31</a:t>
+              <a:t>32</a:t>
             </a:fld>
             <a:endParaRPr lang="en-US"/>
           </a:p>
@@ -2712,7 +2887,7 @@
 </p:notes>
 </file>
 
-<file path=ppt/notesSlides/notesSlide32.xml><?xml version="1.0" encoding="utf-8"?>
+<file path=ppt/notesSlides/notesSlide33.xml><?xml version="1.0" encoding="utf-8"?>
 <p:notes xmlns:a="http://schemas.openxmlformats.org/drawingml/2006/main" xmlns:r="http://schemas.openxmlformats.org/officeDocument/2006/relationships" xmlns:p="http://schemas.openxmlformats.org/presentationml/2006/main">
   <p:cSld>
     <p:spTree>
@@ -2758,7 +2933,22 @@
           <a:p>
             <a:r>
               <a:rPr lang="en-US" dirty="0"/>
-              <a:t/>
+              <a:t>Five files. arg_parse.py owns every command-line flag, main.py owns the
+counting and the printing. Say that out loud before you start, because the
+whole demo turns on it.
+Step 2 is the moment: it proposes a rewrite of a file it has never read,
+and what is on screen is a diff, so the minus lines are a line-by-line
+inventory of what it got wrong. Point at -default=DEFAULT_TOP_N against
++default=10.
+Two prompts to decline there, not one. The second one defaults to Yes, and
+taking the default writes the invented file to disk and loses the demo.
+Step 4 is the lecture in one sentence: same model, same prompt, one more
+file.
+Step 6 drops and re-adds on purpose. Without it all five files are still in
+context and the 4B cannot reproduce the failure. Same mistake, faster: the
+failure was never the model.
+If a step misbehaves, say the sentence and move on. The model can only
+change files that are in context.</a:t>
             </a:r>
             <a:endParaRPr lang="en-US" dirty="0"/>
           </a:p>
@@ -2781,7 +2971,7 @@
           <a:p>
             <a:fld id="{F7021451-1387-4CA6-816F-3879F97B5CBC}" type="slidenum">
               <a:rPr lang="en-US"/>
-              <a:t>32</a:t>
+              <a:t>33</a:t>
             </a:fld>
             <a:endParaRPr lang="en-US"/>
           </a:p>
@@ -2800,7 +2990,7 @@
 </p:notes>
 </file>
 
-<file path=ppt/notesSlides/notesSlide33.xml><?xml version="1.0" encoding="utf-8"?>
+<file path=ppt/notesSlides/notesSlide34.xml><?xml version="1.0" encoding="utf-8"?>
 <p:notes xmlns:a="http://schemas.openxmlformats.org/drawingml/2006/main" xmlns:r="http://schemas.openxmlformats.org/officeDocument/2006/relationships" xmlns:p="http://schemas.openxmlformats.org/presentationml/2006/main">
   <p:cSld>
     <p:spTree>
@@ -2846,7 +3036,22 @@
           <a:p>
             <a:r>
               <a:rPr lang="en-US" dirty="0"/>
-              <a:t/>
+              <a:t>Five files. arg_parse.py owns every command-line flag, main.py owns the
+counting and the printing. Say that out loud before you start, because the
+whole demo turns on it.
+Step 2 is the moment: it proposes a rewrite of a file it has never read,
+and what is on screen is a diff, so the minus lines are a line-by-line
+inventory of what it got wrong. Point at -default=DEFAULT_TOP_N against
++default=10.
+Two prompts to decline there, not one. The second one defaults to Yes, and
+taking the default writes the invented file to disk and loses the demo.
+Step 4 is the lecture in one sentence: same model, same prompt, one more
+file.
+Step 6 drops and re-adds on purpose. Without it all five files are still in
+context and the 4B cannot reproduce the failure. Same mistake, faster: the
+failure was never the model.
+If a step misbehaves, say the sentence and move on. The model can only
+change files that are in context.</a:t>
             </a:r>
             <a:endParaRPr lang="en-US" dirty="0"/>
           </a:p>
@@ -2869,7 +3074,7 @@
           <a:p>
             <a:fld id="{F7021451-1387-4CA6-816F-3879F97B5CBC}" type="slidenum">
               <a:rPr lang="en-US"/>
-              <a:t>33</a:t>
+              <a:t>34</a:t>
             </a:fld>
             <a:endParaRPr lang="en-US"/>
           </a:p>
@@ -2888,7 +3093,7 @@
 </p:notes>
 </file>
 
-<file path=ppt/notesSlides/notesSlide34.xml><?xml version="1.0" encoding="utf-8"?>
+<file path=ppt/notesSlides/notesSlide35.xml><?xml version="1.0" encoding="utf-8"?>
 <p:notes xmlns:a="http://schemas.openxmlformats.org/drawingml/2006/main" xmlns:r="http://schemas.openxmlformats.org/officeDocument/2006/relationships" xmlns:p="http://schemas.openxmlformats.org/presentationml/2006/main">
   <p:cSld>
     <p:spTree>
@@ -2934,7 +3139,22 @@
           <a:p>
             <a:r>
               <a:rPr lang="en-US" dirty="0"/>
-              <a:t/>
+              <a:t>Five files. arg_parse.py owns every command-line flag, main.py owns the
+counting and the printing. Say that out loud before you start, because the
+whole demo turns on it.
+Step 2 is the moment: it proposes a rewrite of a file it has never read,
+and what is on screen is a diff, so the minus lines are a line-by-line
+inventory of what it got wrong. Point at -default=DEFAULT_TOP_N against
++default=10.
+Two prompts to decline there, not one. The second one defaults to Yes, and
+taking the default writes the invented file to disk and loses the demo.
+Step 4 is the lecture in one sentence: same model, same prompt, one more
+file.
+Step 6 drops and re-adds on purpose. Without it all five files are still in
+context and the 4B cannot reproduce the failure. Same mistake, faster: the
+failure was never the model.
+If a step misbehaves, say the sentence and move on. The model can only
+change files that are in context.</a:t>
             </a:r>
             <a:endParaRPr lang="en-US" dirty="0"/>
           </a:p>
@@ -2957,7 +3177,7 @@
           <a:p>
             <a:fld id="{F7021451-1387-4CA6-816F-3879F97B5CBC}" type="slidenum">
               <a:rPr lang="en-US"/>
-              <a:t>34</a:t>
+              <a:t>35</a:t>
             </a:fld>
             <a:endParaRPr lang="en-US"/>
           </a:p>
@@ -2976,7 +3196,7 @@
 </p:notes>
 </file>
 
-<file path=ppt/notesSlides/notesSlide35.xml><?xml version="1.0" encoding="utf-8"?>
+<file path=ppt/notesSlides/notesSlide36.xml><?xml version="1.0" encoding="utf-8"?>
 <p:notes xmlns:a="http://schemas.openxmlformats.org/drawingml/2006/main" xmlns:r="http://schemas.openxmlformats.org/officeDocument/2006/relationships" xmlns:p="http://schemas.openxmlformats.org/presentationml/2006/main">
   <p:cSld>
     <p:spTree>
@@ -3022,7 +3242,22 @@
           <a:p>
             <a:r>
               <a:rPr lang="en-US" dirty="0"/>
-              <a:t/>
+              <a:t>Five files. arg_parse.py owns every command-line flag, main.py owns the
+counting and the printing. Say that out loud before you start, because the
+whole demo turns on it.
+Step 2 is the moment: it proposes a rewrite of a file it has never read,
+and what is on screen is a diff, so the minus lines are a line-by-line
+inventory of what it got wrong. Point at -default=DEFAULT_TOP_N against
++default=10.
+Two prompts to decline there, not one. The second one defaults to Yes, and
+taking the default writes the invented file to disk and loses the demo.
+Step 4 is the lecture in one sentence: same model, same prompt, one more
+file.
+Step 6 drops and re-adds on purpose. Without it all five files are still in
+context and the 4B cannot reproduce the failure. Same mistake, faster: the
+failure was never the model.
+If a step misbehaves, say the sentence and move on. The model can only
+change files that are in context.</a:t>
             </a:r>
             <a:endParaRPr lang="en-US" dirty="0"/>
           </a:p>
@@ -3045,7 +3280,7 @@
           <a:p>
             <a:fld id="{F7021451-1387-4CA6-816F-3879F97B5CBC}" type="slidenum">
               <a:rPr lang="en-US"/>
-              <a:t>35</a:t>
+              <a:t>36</a:t>
             </a:fld>
             <a:endParaRPr lang="en-US"/>
           </a:p>
@@ -3064,7 +3299,7 @@
 </p:notes>
 </file>
 
-<file path=ppt/notesSlides/notesSlide36.xml><?xml version="1.0" encoding="utf-8"?>
+<file path=ppt/notesSlides/notesSlide37.xml><?xml version="1.0" encoding="utf-8"?>
 <p:notes xmlns:a="http://schemas.openxmlformats.org/drawingml/2006/main" xmlns:r="http://schemas.openxmlformats.org/officeDocument/2006/relationships" xmlns:p="http://schemas.openxmlformats.org/presentationml/2006/main">
   <p:cSld>
     <p:spTree>
@@ -3110,7 +3345,22 @@
           <a:p>
             <a:r>
               <a:rPr lang="en-US" dirty="0"/>
-              <a:t/>
+              <a:t>Five files. arg_parse.py owns every command-line flag, main.py owns the
+counting and the printing. Say that out loud before you start, because the
+whole demo turns on it.
+Step 2 is the moment: it proposes a rewrite of a file it has never read,
+and what is on screen is a diff, so the minus lines are a line-by-line
+inventory of what it got wrong. Point at -default=DEFAULT_TOP_N against
++default=10.
+Two prompts to decline there, not one. The second one defaults to Yes, and
+taking the default writes the invented file to disk and loses the demo.
+Step 4 is the lecture in one sentence: same model, same prompt, one more
+file.
+Step 6 drops and re-adds on purpose. Without it all five files are still in
+context and the 4B cannot reproduce the failure. Same mistake, faster: the
+failure was never the model.
+If a step misbehaves, say the sentence and move on. The model can only
+change files that are in context.</a:t>
             </a:r>
             <a:endParaRPr lang="en-US" dirty="0"/>
           </a:p>
@@ -3133,7 +3383,7 @@
           <a:p>
             <a:fld id="{F7021451-1387-4CA6-816F-3879F97B5CBC}" type="slidenum">
               <a:rPr lang="en-US"/>
-              <a:t>36</a:t>
+              <a:t>37</a:t>
             </a:fld>
             <a:endParaRPr lang="en-US"/>
           </a:p>
@@ -3152,7 +3402,7 @@
 </p:notes>
 </file>
 
-<file path=ppt/notesSlides/notesSlide37.xml><?xml version="1.0" encoding="utf-8"?>
+<file path=ppt/notesSlides/notesSlide38.xml><?xml version="1.0" encoding="utf-8"?>
 <p:notes xmlns:a="http://schemas.openxmlformats.org/drawingml/2006/main" xmlns:r="http://schemas.openxmlformats.org/officeDocument/2006/relationships" xmlns:p="http://schemas.openxmlformats.org/presentationml/2006/main">
   <p:cSld>
     <p:spTree>
@@ -3198,7 +3448,22 @@
           <a:p>
             <a:r>
               <a:rPr lang="en-US" dirty="0"/>
-              <a:t/>
+              <a:t>Five files. arg_parse.py owns every command-line flag, main.py owns the
+counting and the printing. Say that out loud before you start, because the
+whole demo turns on it.
+Step 2 is the moment: it proposes a rewrite of a file it has never read,
+and what is on screen is a diff, so the minus lines are a line-by-line
+inventory of what it got wrong. Point at -default=DEFAULT_TOP_N against
++default=10.
+Two prompts to decline there, not one. The second one defaults to Yes, and
+taking the default writes the invented file to disk and loses the demo.
+Step 4 is the lecture in one sentence: same model, same prompt, one more
+file.
+Step 6 drops and re-adds on purpose. Without it all five files are still in
+context and the 4B cannot reproduce the failure. Same mistake, faster: the
+failure was never the model.
+If a step misbehaves, say the sentence and move on. The model can only
+change files that are in context.</a:t>
             </a:r>
             <a:endParaRPr lang="en-US" dirty="0"/>
           </a:p>
@@ -3221,7 +3486,7 @@
           <a:p>
             <a:fld id="{F7021451-1387-4CA6-816F-3879F97B5CBC}" type="slidenum">
               <a:rPr lang="en-US"/>
-              <a:t>37</a:t>
+              <a:t>38</a:t>
             </a:fld>
             <a:endParaRPr lang="en-US"/>
           </a:p>
@@ -3240,94 +3505,6 @@
 </p:notes>
 </file>
 
-<file path=ppt/notesSlides/notesSlide38.xml><?xml version="1.0" encoding="utf-8"?>
-<p:notes xmlns:a="http://schemas.openxmlformats.org/drawingml/2006/main" xmlns:r="http://schemas.openxmlformats.org/officeDocument/2006/relationships" xmlns:p="http://schemas.openxmlformats.org/presentationml/2006/main">
-  <p:cSld>
-    <p:spTree>
-      <p:nvGrpSpPr>
-        <p:cNvPr id="1" name=""/>
-        <p:cNvGrpSpPr/>
-        <p:nvPr/>
-      </p:nvGrpSpPr>
-      <p:grpSpPr>
-        <a:xfrm>
-          <a:off x="0" y="0"/>
-          <a:ext cx="0" cy="0"/>
-          <a:chOff x="0" y="0"/>
-          <a:chExt cx="0" cy="0"/>
-        </a:xfrm>
-      </p:grpSpPr>
-      <p:sp>
-        <p:nvSpPr>
-          <p:cNvPr id="2" name="Slide Image Placeholder 1"/>
-          <p:cNvSpPr>
-            <a:spLocks noGrp="1" noRot="1" noChangeAspect="1"/>
-          </p:cNvSpPr>
-          <p:nvPr>
-            <p:ph type="sldImg"/>
-          </p:nvPr>
-        </p:nvSpPr>
-        <p:spPr/>
-      </p:sp>
-      <p:sp>
-        <p:nvSpPr>
-          <p:cNvPr id="3" name="Notes Placeholder 2"/>
-          <p:cNvSpPr>
-            <a:spLocks noGrp="1"/>
-          </p:cNvSpPr>
-          <p:nvPr>
-            <p:ph type="body" idx="1"/>
-          </p:nvPr>
-        </p:nvSpPr>
-        <p:spPr/>
-        <p:txBody>
-          <a:bodyPr/>
-          <a:lstStyle/>
-          <a:p>
-            <a:r>
-              <a:rPr lang="en-US" dirty="0"/>
-              <a:t/>
-            </a:r>
-            <a:endParaRPr lang="en-US" dirty="0"/>
-          </a:p>
-        </p:txBody>
-      </p:sp>
-      <p:sp>
-        <p:nvSpPr>
-          <p:cNvPr id="4" name="Slide Number Placeholder 3"/>
-          <p:cNvSpPr>
-            <a:spLocks noGrp="1"/>
-          </p:cNvSpPr>
-          <p:nvPr>
-            <p:ph type="sldNum" sz="quarter" idx="10"/>
-          </p:nvPr>
-        </p:nvSpPr>
-        <p:spPr/>
-        <p:txBody>
-          <a:bodyPr/>
-          <a:lstStyle/>
-          <a:p>
-            <a:fld id="{F7021451-1387-4CA6-816F-3879F97B5CBC}" type="slidenum">
-              <a:rPr lang="en-US"/>
-              <a:t>38</a:t>
-            </a:fld>
-            <a:endParaRPr lang="en-US"/>
-          </a:p>
-        </p:txBody>
-      </p:sp>
-    </p:spTree>
-    <p:extLst>
-      <p:ext uri="{BB962C8B-B14F-4D97-AF65-F5344CB8AC3E}">
-        <p14:creationId xmlns:p14="http://schemas.microsoft.com/office/powerpoint/2010/main" val="1024086991"/>
-      </p:ext>
-    </p:extLst>
-  </p:cSld>
-  <p:clrMapOvr>
-    <a:masterClrMapping/>
-  </p:clrMapOvr>
-</p:notes>
-</file>
-
 <file path=ppt/notesSlides/notesSlide39.xml><?xml version="1.0" encoding="utf-8"?>
 <p:notes xmlns:a="http://schemas.openxmlformats.org/drawingml/2006/main" xmlns:r="http://schemas.openxmlformats.org/officeDocument/2006/relationships" xmlns:p="http://schemas.openxmlformats.org/presentationml/2006/main">
   <p:cSld>
@@ -3374,7 +3551,22 @@
           <a:p>
             <a:r>
               <a:rPr lang="en-US" dirty="0"/>
-              <a:t/>
+              <a:t>Five files. arg_parse.py owns every command-line flag, main.py owns the
+counting and the printing. Say that out loud before you start, because the
+whole demo turns on it.
+Step 2 is the moment: it proposes a rewrite of a file it has never read,
+and what is on screen is a diff, so the minus lines are a line-by-line
+inventory of what it got wrong. Point at -default=DEFAULT_TOP_N against
++default=10.
+Two prompts to decline there, not one. The second one defaults to Yes, and
+taking the default writes the invented file to disk and loses the demo.
+Step 4 is the lecture in one sentence: same model, same prompt, one more
+file.
+Step 6 drops and re-adds on purpose. Without it all five files are still in
+context and the 4B cannot reproduce the failure. Same mistake, faster: the
+failure was never the model.
+If a step misbehaves, say the sentence and move on. The model can only
+change files that are in context.</a:t>
             </a:r>
             <a:endParaRPr lang="en-US" dirty="0"/>
           </a:p>
@@ -3553,7 +3745,9 @@
           <a:p>
             <a:r>
               <a:rPr lang="en-US" dirty="0"/>
-              <a:t/>
+              <a:t>Not rhetorical. Ask them to actually answer these before Lab01.
+Question 2 is the one most of them get wrong: worse, not merely more
+expensive.</a:t>
             </a:r>
             <a:endParaRPr lang="en-US" dirty="0"/>
           </a:p>
@@ -3641,7 +3835,10 @@
           <a:p>
             <a:r>
               <a:rPr lang="en-US" dirty="0"/>
-              <a:t/>
+              <a:t>The concrete payoff: /add and /drop are one of the seven features they
+implement in weeks 3 and 4. Pulling a file into context is another, and
+the trimming behind multi-turn history is a third.
+They are drilling this week the exact behaviour they will have to write.</a:t>
             </a:r>
             <a:endParaRPr lang="en-US" dirty="0"/>
           </a:p>
@@ -3729,7 +3926,12 @@
           <a:p>
             <a:r>
               <a:rPr lang="en-US" dirty="0"/>
-              <a:t/>
+              <a:t>Friday is the gate and all sixteen lessons, both.
+They are not building yet. The build starts after Lab01 and the spec is
+graded with it.
+Thursday is Spec-Driven Coding: plan equals prompt, the artifact that makes
+"be concrete" reproducible at scale, and the last technique before the
+build.</a:t>
             </a:r>
             <a:endParaRPr lang="en-US" dirty="0"/>
           </a:p>
@@ -3817,7 +4019,12 @@
           <a:p>
             <a:r>
               <a:rPr lang="en-US" dirty="0"/>
-              <a:t/>
+              <a:t>Friday is the gate and all sixteen lessons, both.
+They are not building yet. The build starts after Lab01 and the spec is
+graded with it.
+Thursday is Spec-Driven Coding: plan equals prompt, the artifact that makes
+"be concrete" reproducible at scale, and the last technique before the
+build.</a:t>
             </a:r>
             <a:endParaRPr lang="en-US" dirty="0"/>
           </a:p>
@@ -3905,7 +4112,12 @@
           <a:p>
             <a:r>
               <a:rPr lang="en-US" dirty="0"/>
-              <a:t/>
+              <a:t>Friday is the gate and all sixteen lessons, both.
+They are not building yet. The build starts after Lab01 and the spec is
+graded with it.
+Thursday is Spec-Driven Coding: plan equals prompt, the artifact that makes
+"be concrete" reproducible at scale, and the last technique before the
+build.</a:t>
             </a:r>
             <a:endParaRPr lang="en-US" dirty="0"/>
           </a:p>
@@ -3993,7 +4205,12 @@
           <a:p>
             <a:r>
               <a:rPr lang="en-US" dirty="0"/>
-              <a:t/>
+              <a:t>Friday is the gate and all sixteen lessons, both.
+They are not building yet. The build starts after Lab01 and the spec is
+graded with it.
+Thursday is Spec-Driven Coding: plan equals prompt, the artifact that makes
+"be concrete" reproducible at scale, and the last technique before the
+build.</a:t>
             </a:r>
             <a:endParaRPr lang="en-US" dirty="0"/>
           </a:p>
@@ -4081,7 +4298,12 @@
           <a:p>
             <a:r>
               <a:rPr lang="en-US" dirty="0"/>
-              <a:t/>
+              <a:t>Friday is the gate and all sixteen lessons, both.
+They are not building yet. The build starts after Lab01 and the spec is
+graded with it.
+Thursday is Spec-Driven Coding: plan equals prompt, the artifact that makes
+"be concrete" reproducible at scale, and the last technique before the
+build.</a:t>
             </a:r>
             <a:endParaRPr lang="en-US" dirty="0"/>
           </a:p>
@@ -4123,6 +4345,94 @@
 </p:notes>
 </file>
 
+<file path=ppt/notesSlides/notesSlide47.xml><?xml version="1.0" encoding="utf-8"?>
+<p:notes xmlns:a="http://schemas.openxmlformats.org/drawingml/2006/main" xmlns:r="http://schemas.openxmlformats.org/officeDocument/2006/relationships" xmlns:p="http://schemas.openxmlformats.org/presentationml/2006/main">
+  <p:cSld>
+    <p:spTree>
+      <p:nvGrpSpPr>
+        <p:cNvPr id="1" name=""/>
+        <p:cNvGrpSpPr/>
+        <p:nvPr/>
+      </p:nvGrpSpPr>
+      <p:grpSpPr>
+        <a:xfrm>
+          <a:off x="0" y="0"/>
+          <a:ext cx="0" cy="0"/>
+          <a:chOff x="0" y="0"/>
+          <a:chExt cx="0" cy="0"/>
+        </a:xfrm>
+      </p:grpSpPr>
+      <p:sp>
+        <p:nvSpPr>
+          <p:cNvPr id="2" name="Slide Image Placeholder 1"/>
+          <p:cNvSpPr>
+            <a:spLocks noGrp="1" noRot="1" noChangeAspect="1"/>
+          </p:cNvSpPr>
+          <p:nvPr>
+            <p:ph type="sldImg"/>
+          </p:nvPr>
+        </p:nvSpPr>
+        <p:spPr/>
+      </p:sp>
+      <p:sp>
+        <p:nvSpPr>
+          <p:cNvPr id="3" name="Notes Placeholder 2"/>
+          <p:cNvSpPr>
+            <a:spLocks noGrp="1"/>
+          </p:cNvSpPr>
+          <p:nvPr>
+            <p:ph type="body" idx="1"/>
+          </p:nvPr>
+        </p:nvSpPr>
+        <p:spPr/>
+        <p:txBody>
+          <a:bodyPr/>
+          <a:lstStyle/>
+          <a:p>
+            <a:r>
+              <a:rPr lang="en-US" dirty="0"/>
+              <a:t/>
+            </a:r>
+            <a:endParaRPr lang="en-US" dirty="0"/>
+          </a:p>
+        </p:txBody>
+      </p:sp>
+      <p:sp>
+        <p:nvSpPr>
+          <p:cNvPr id="4" name="Slide Number Placeholder 3"/>
+          <p:cNvSpPr>
+            <a:spLocks noGrp="1"/>
+          </p:cNvSpPr>
+          <p:nvPr>
+            <p:ph type="sldNum" sz="quarter" idx="10"/>
+          </p:nvPr>
+        </p:nvSpPr>
+        <p:spPr/>
+        <p:txBody>
+          <a:bodyPr/>
+          <a:lstStyle/>
+          <a:p>
+            <a:fld id="{F7021451-1387-4CA6-816F-3879F97B5CBC}" type="slidenum">
+              <a:rPr lang="en-US"/>
+              <a:t>47</a:t>
+            </a:fld>
+            <a:endParaRPr lang="en-US"/>
+          </a:p>
+        </p:txBody>
+      </p:sp>
+    </p:spTree>
+    <p:extLst>
+      <p:ext uri="{BB962C8B-B14F-4D97-AF65-F5344CB8AC3E}">
+        <p14:creationId xmlns:p14="http://schemas.microsoft.com/office/powerpoint/2010/main" val="1024086991"/>
+      </p:ext>
+    </p:extLst>
+  </p:cSld>
+  <p:clrMapOvr>
+    <a:masterClrMapping/>
+  </p:clrMapOvr>
+</p:notes>
+</file>
+
 <file path=ppt/notesSlides/notesSlide5.xml><?xml version="1.0" encoding="utf-8"?>
 <p:notes xmlns:a="http://schemas.openxmlformats.org/drawingml/2006/main" xmlns:r="http://schemas.openxmlformats.org/officeDocument/2006/relationships" xmlns:p="http://schemas.openxmlformats.org/presentationml/2006/main">
   <p:cSld>
@@ -4169,7 +4479,13 @@
           <a:p>
             <a:r>
               <a:rPr lang="en-US" dirty="0"/>
-              <a:t>The Bullseye. Magic happens at the intersection. Miss any one → off-target.</a:t>
+              <a:t>Draw it in the air first, then let the slide confirm it. Three circles,
+target at the intersection.
+Walk the three near-misses in order and ask which one they think is most
+common before you say it. Zone 1 is the demo at 1:00, so name it now and
+they will recognise it when it happens.
+Zones 2 and 3 are the honest ones: a weak model and a vague prompt both
+produce output that looks like progress.</a:t>
             </a:r>
             <a:endParaRPr lang="en-US" dirty="0"/>
           </a:p>
@@ -4257,7 +4573,8 @@
           <a:p>
             <a:r>
               <a:rPr lang="en-US" dirty="0"/>
-              <a:t/>
+              <a:t>The punchline of the diagram they just read. Say it flat, then move.
+Effort in the other two levers does not buy back the one you missed.</a:t>
             </a:r>
             <a:endParaRPr lang="en-US" dirty="0"/>
           </a:p>
@@ -4345,7 +4662,11 @@
           <a:p>
             <a:r>
               <a:rPr lang="en-US" dirty="0"/>
-              <a:t/>
+              <a:t>The key point of the lecture. When something comes back wrong, ask these
+three in order before you touch anything.
+Most students blame the model. It is statistically the least common cause.
+Usually it is context.
+Tell them now that they will use this in Lab01 next week.</a:t>
             </a:r>
             <a:endParaRPr lang="en-US" dirty="0"/>
           </a:p>
@@ -4433,7 +4754,9 @@
           <a:p>
             <a:r>
               <a:rPr lang="en-US" dirty="0"/>
-              <a:t/>
+              <a:t>The lever they control most directly, and the one that causes the most
+trouble. Most of the next twenty minutes lives here.
+In a few weeks they implement this themselves.</a:t>
             </a:r>
             <a:endParaRPr lang="en-US" dirty="0"/>
           </a:p>
@@ -4521,7 +4844,12 @@
           <a:p>
             <a:r>
               <a:rPr lang="en-US" dirty="0"/>
-              <a:t/>
+              <a:t>Added files are the only files the model can edit. Say that twice.
+The repo map is an auto-generated summary, not a substitute for adding the
+file.
+Chat history accumulates until /clear. That is the second pitfall, two
+slides from now.
+The system prompt is Aider's own, and the default is fine for now.</a:t>
             </a:r>
             <a:endParaRPr lang="en-US" dirty="0"/>
           </a:p>
@@ -6433,6 +6761,45 @@
 <file path=ppt/slides/slide46.xml><?xml version="1.0" encoding="utf-8"?>
 <p:sld xmlns:a="http://schemas.openxmlformats.org/drawingml/2006/main" xmlns:r="http://schemas.openxmlformats.org/officeDocument/2006/relationships" xmlns:p="http://schemas.openxmlformats.org/presentationml/2006/main">
   <p:cSld name="Slide 46">
+    <p:bg>
+      <p:bgPr>
+        <a:blipFill dpi="0" rotWithShape="1">
+          <a:blip r:embed="rId1">
+            <a:lum/>
+          </a:blip>
+          <a:srcRect/>
+          <a:stretch>
+            <a:fillRect/>
+          </a:stretch>
+        </a:blipFill>
+        <a:effectLst/>
+      </p:bgPr>
+    </p:bg>
+    <p:spTree>
+      <p:nvGrpSpPr>
+        <p:cNvPr id="1" name=""/>
+        <p:cNvGrpSpPr/>
+        <p:nvPr/>
+      </p:nvGrpSpPr>
+      <p:grpSpPr>
+        <a:xfrm>
+          <a:off x="0" y="0"/>
+          <a:ext cx="0" cy="0"/>
+          <a:chOff x="0" y="0"/>
+          <a:chExt cx="0" cy="0"/>
+        </a:xfrm>
+      </p:grpSpPr>
+    </p:spTree>
+  </p:cSld>
+  <p:clrMapOvr>
+    <a:masterClrMapping/>
+  </p:clrMapOvr>
+</p:sld>
+</file>
+
+<file path=ppt/slides/slide47.xml><?xml version="1.0" encoding="utf-8"?>
+<p:sld xmlns:a="http://schemas.openxmlformats.org/drawingml/2006/main" xmlns:r="http://schemas.openxmlformats.org/officeDocument/2006/relationships" xmlns:p="http://schemas.openxmlformats.org/presentationml/2006/main">
+  <p:cSld name="Slide 47">
     <p:bg>
       <p:bgPr>
         <a:blipFill dpi="0" rotWithShape="1">
